--- a/Planning docs/Slides/lesson-21-4-teacher-slides.pptx
+++ b/Planning docs/Slides/lesson-21-4-teacher-slides.pptx
@@ -5128,7 +5128,7 @@
                 <a:ea typeface="Calibri" pitchFamily="34" charset="-122"/>
                 <a:cs typeface="Calibri" pitchFamily="34" charset="-120"/>
               </a:rPr>
-              <a:t>•  Good readers think about the whole book. Now that you have read all 20 chapters, ask: what was this story really about? What did we learn from watching these two characters together?</a:t>
+              <a:t>•  Think back to Chapter 1. How has the king's view of Jemmy changed from beginning to end?</a:t>
             </a:r>
             <a:endParaRPr lang="en-US" sz="1500" dirty="0"/>
           </a:p>
@@ -5145,24 +5145,7 @@
                 <a:ea typeface="Calibri" pitchFamily="34" charset="-122"/>
                 <a:cs typeface="Calibri" pitchFamily="34" charset="-120"/>
               </a:rPr>
-              <a:t>•  The sea “crawls” far below the eagle. What does that one word tell you about how high up he is?</a:t>
-            </a:r>
-            <a:endParaRPr lang="en-US" sz="1500" dirty="0"/>
-          </a:p>
-          <a:p>
-            <a:pPr indent="0" marL="0">
-              <a:buNone/>
-            </a:pPr>
-            <a:r>
-              <a:rPr lang="en-US" sz="1500" dirty="0">
-                <a:solidFill>
-                  <a:srgbClr val="1E293B"/>
-                </a:solidFill>
-                <a:latin typeface="Calibri" pitchFamily="34" charset="0"/>
-                <a:ea typeface="Calibri" pitchFamily="34" charset="-122"/>
-                <a:cs typeface="Calibri" pitchFamily="34" charset="-120"/>
-              </a:rPr>
-              <a:t>•  Look at the letters around the dot in each word. Count: vowel, consonant, consonant, vowel. That's the VCCV pattern .</a:t>
+              <a:t>•  The book ends with ballad sellers making up new verses about Hold-Your-Nose Billy. Why is this a funny and fitting ending?</a:t>
             </a:r>
             <a:endParaRPr lang="en-US" sz="1500" dirty="0"/>
           </a:p>
